--- a/docs/viva/slides.pptx
+++ b/docs/viva/slides.pptx
@@ -2493,7 +2493,7 @@
                 <a:ea typeface="Georgia" pitchFamily="34" charset="-122"/>
                 <a:cs typeface="Georgia" pitchFamily="34" charset="-120"/>
               </a:rPr>
-              <a:t>433</a:t>
+              <a:t>441</a:t>
             </a:r>
             <a:endParaRPr lang="en-US" sz="3600" dirty="0"/>
           </a:p>
@@ -2779,7 +2779,7 @@
                 <a:ea typeface="Arial" pitchFamily="34" charset="-122"/>
                 <a:cs typeface="Arial" pitchFamily="34" charset="-120"/>
               </a:rPr>
-              <a:t>Lint + 433 tests</a:t>
+              <a:t>Lint + 441 tests</a:t>
             </a:r>
             <a:endParaRPr lang="en-US" sz="1600" dirty="0"/>
           </a:p>

--- a/docs/viva/slides.pptx
+++ b/docs/viva/slides.pptx
@@ -2493,7 +2493,7 @@
                 <a:ea typeface="Georgia" pitchFamily="34" charset="-122"/>
                 <a:cs typeface="Georgia" pitchFamily="34" charset="-120"/>
               </a:rPr>
-              <a:t>441</a:t>
+              <a:t>456</a:t>
             </a:r>
             <a:endParaRPr lang="en-US" sz="3600" dirty="0"/>
           </a:p>
@@ -2779,7 +2779,7 @@
                 <a:ea typeface="Arial" pitchFamily="34" charset="-122"/>
                 <a:cs typeface="Arial" pitchFamily="34" charset="-120"/>
               </a:rPr>
-              <a:t>Lint + 441 tests</a:t>
+              <a:t>Lint + 456 tests</a:t>
             </a:r>
             <a:endParaRPr lang="en-US" sz="1600" dirty="0"/>
           </a:p>

--- a/docs/viva/slides.pptx
+++ b/docs/viva/slides.pptx
@@ -12,6 +12,7 @@
     <p:sldId id="260" r:id="rId6"/>
     <p:sldId id="261" r:id="rId7"/>
     <p:sldId id="262" r:id="rId8"/>
+    <p:sldId id="268" r:id="rId19"/>
     <p:sldId id="263" r:id="rId9"/>
     <p:sldId id="264" r:id="rId10"/>
     <p:sldId id="265" r:id="rId11"/>
@@ -1134,6 +1135,94 @@
             <a:fld id="{F7021451-1387-4CA6-816F-3879F97B5CBC}" type="slidenum">
               <a:rPr lang="en-US"/>
               <a:t>12</a:t>
+            </a:fld>
+            <a:endParaRPr lang="en-US"/>
+          </a:p>
+        </p:txBody>
+      </p:sp>
+    </p:spTree>
+    <p:extLst>
+      <p:ext uri="{BB962C8B-B14F-4D97-AF65-F5344CB8AC3E}">
+        <p14:creationId xmlns:p14="http://schemas.microsoft.com/office/powerpoint/2010/main" val="1024086991"/>
+      </p:ext>
+    </p:extLst>
+  </p:cSld>
+  <p:clrMapOvr>
+    <a:masterClrMapping/>
+  </p:clrMapOvr>
+</p:notes>
+</file>
+
+<file path=ppt/notesSlides/notesSlide13.xml><?xml version="1.0" encoding="utf-8"?>
+<p:notes xmlns:a="http://schemas.openxmlformats.org/drawingml/2006/main" xmlns:r="http://schemas.openxmlformats.org/officeDocument/2006/relationships" xmlns:p="http://schemas.openxmlformats.org/presentationml/2006/main">
+  <p:cSld>
+    <p:spTree>
+      <p:nvGrpSpPr>
+        <p:cNvPr id="1" name=""/>
+        <p:cNvGrpSpPr/>
+        <p:nvPr/>
+      </p:nvGrpSpPr>
+      <p:grpSpPr>
+        <a:xfrm>
+          <a:off x="0" y="0"/>
+          <a:ext cx="0" cy="0"/>
+          <a:chOff x="0" y="0"/>
+          <a:chExt cx="0" cy="0"/>
+        </a:xfrm>
+      </p:grpSpPr>
+      <p:sp>
+        <p:nvSpPr>
+          <p:cNvPr id="2" name="Slide Image Placeholder 1"/>
+          <p:cNvSpPr>
+            <a:spLocks noGrp="1" noRot="1" noChangeAspect="1"/>
+          </p:cNvSpPr>
+          <p:nvPr>
+            <p:ph type="sldImg"/>
+          </p:nvPr>
+        </p:nvSpPr>
+        <p:spPr/>
+      </p:sp>
+      <p:sp>
+        <p:nvSpPr>
+          <p:cNvPr id="3" name="Notes Placeholder 2"/>
+          <p:cNvSpPr>
+            <a:spLocks noGrp="1"/>
+          </p:cNvSpPr>
+          <p:nvPr>
+            <p:ph type="body" idx="1"/>
+          </p:nvPr>
+        </p:nvSpPr>
+        <p:spPr/>
+        <p:txBody>
+          <a:bodyPr/>
+          <a:lstStyle/>
+          <a:p>
+            <a:r>
+              <a:rPr lang="en-US" dirty="0"/>
+              <a:t>Open the dashboard Overview. Click Run 1 Jan 2017 and talk over the stages as they light up; point at Go live and the header, which now names the live model. Then Run 31 Jan 2017: rejected by the gate. Run 28 Feb 2017 after showing MLflow. Press Restore before the Score tab.</a:t>
+            </a:r>
+            <a:endParaRPr lang="en-US" dirty="0"/>
+          </a:p>
+        </p:txBody>
+      </p:sp>
+      <p:sp>
+        <p:nvSpPr>
+          <p:cNvPr id="4" name="Slide Number Placeholder 3"/>
+          <p:cNvSpPr>
+            <a:spLocks noGrp="1"/>
+          </p:cNvSpPr>
+          <p:nvPr>
+            <p:ph type="sldNum" sz="quarter" idx="10"/>
+          </p:nvPr>
+        </p:nvSpPr>
+        <p:spPr/>
+        <p:txBody>
+          <a:bodyPr/>
+          <a:lstStyle/>
+          <a:p>
+            <a:fld id="{F7021451-1387-4CA6-816F-3879F97B5CBC}" type="slidenum">
+              <a:rPr lang="en-US"/>
+              <a:t>8</a:t>
             </a:fld>
             <a:endParaRPr lang="en-US"/>
           </a:p>
@@ -5229,6 +5318,566 @@
 </p:sld>
 </file>
 
+<file path=ppt/slides/slide13.xml><?xml version="1.0" encoding="utf-8"?>
+<p:sld xmlns:a="http://schemas.openxmlformats.org/drawingml/2006/main" xmlns:r="http://schemas.openxmlformats.org/officeDocument/2006/relationships" xmlns:p="http://schemas.openxmlformats.org/presentationml/2006/main">
+  <p:cSld name="Slide 13">
+    <p:bg>
+      <p:bgPr>
+        <a:solidFill>
+          <a:srgbClr val="08090B"/>
+        </a:solidFill>
+      </p:bgPr>
+    </p:bg>
+    <p:spTree>
+      <p:nvGrpSpPr>
+        <p:cNvPr id="1" name=""/>
+        <p:cNvGrpSpPr/>
+        <p:nvPr/>
+      </p:nvGrpSpPr>
+      <p:grpSpPr>
+        <a:xfrm>
+          <a:off x="0" y="0"/>
+          <a:ext cx="0" cy="0"/>
+          <a:chOff x="0" y="0"/>
+          <a:chExt cx="0" cy="0"/>
+        </a:xfrm>
+      </p:grpSpPr>
+      <p:sp>
+        <p:nvSpPr>
+          <p:cNvPr id="2" name="Text 0"/>
+          <p:cNvSpPr txBox="1"/>
+          <p:nvPr/>
+        </p:nvSpPr>
+        <p:spPr>
+          <a:xfrm>
+            <a:off x="548640" y="411480"/>
+            <a:ext cx="8229600" cy="274320"/>
+          </a:xfrm>
+          <a:prstGeom prst="rect">
+            <a:avLst/>
+          </a:prstGeom>
+          <a:noFill/>
+          <a:ln/>
+        </p:spPr>
+        <p:txBody>
+          <a:bodyPr wrap="square" lIns="0" tIns="0" rIns="0" bIns="0" rtlCol="0" anchor="ctr"/>
+          <a:lstStyle/>
+          <a:p>
+            <a:pPr indent="0" marL="0">
+              <a:buNone/>
+            </a:pPr>
+            <a:r>
+              <a:rPr lang="en-US" sz="1100" b="1" spc="300" kern="0" dirty="0">
+                <a:solidFill>
+                  <a:srgbClr val="3ED6C0"/>
+                </a:solidFill>
+                <a:latin typeface="Arial" pitchFamily="34" charset="0"/>
+                <a:ea typeface="Arial" pitchFamily="34" charset="-122"/>
+                <a:cs typeface="Arial" pitchFamily="34" charset="-120"/>
+              </a:rPr>
+              <a:t>LIVE PIPELINE · RETRAIN, GATE, DEPLOY</a:t>
+            </a:r>
+            <a:endParaRPr lang="en-US" sz="1100" dirty="0"/>
+          </a:p>
+        </p:txBody>
+      </p:sp>
+      <p:sp>
+        <p:nvSpPr>
+          <p:cNvPr id="3" name="Text 1"/>
+          <p:cNvSpPr txBox="1"/>
+          <p:nvPr/>
+        </p:nvSpPr>
+        <p:spPr>
+          <a:xfrm>
+            <a:off x="548640" y="685800"/>
+            <a:ext cx="11094415" cy="731520"/>
+          </a:xfrm>
+          <a:prstGeom prst="rect">
+            <a:avLst/>
+          </a:prstGeom>
+          <a:noFill/>
+          <a:ln/>
+        </p:spPr>
+        <p:txBody>
+          <a:bodyPr wrap="square" lIns="0" tIns="0" rIns="0" bIns="0" rtlCol="0" anchor="ctr"/>
+          <a:lstStyle/>
+          <a:p>
+            <a:pPr indent="0" marL="0">
+              <a:buNone/>
+            </a:pPr>
+            <a:r>
+              <a:rPr lang="en-US" sz="3200" dirty="0">
+                <a:solidFill>
+                  <a:srgbClr val="F4F6F8"/>
+                </a:solidFill>
+                <a:latin typeface="Georgia" pitchFamily="34" charset="0"/>
+                <a:ea typeface="Georgia" pitchFamily="34" charset="-122"/>
+                <a:cs typeface="Georgia" pitchFamily="34" charset="-120"/>
+              </a:rPr>
+              <a:t>Press Run: it retrains on real months</a:t>
+            </a:r>
+            <a:endParaRPr lang="en-US" sz="3200" dirty="0"/>
+          </a:p>
+        </p:txBody>
+      </p:sp>
+      <p:pic>
+        <p:nvPicPr>
+          <p:cNvPr id="4" name="Image 0" descr="Dashboard Overview: the live pipeline">    </p:cNvPr>
+          <p:cNvPicPr>
+            <a:picLocks noChangeAspect="1"/>
+          </p:cNvPicPr>
+          <p:nvPr/>
+        </p:nvPicPr>
+        <p:blipFill>
+          <a:blip r:embed="rId1"/>
+          <a:stretch>
+            <a:fillRect/>
+          </a:stretch>
+        </p:blipFill>
+        <p:spPr>
+          <a:xfrm>
+            <a:off x="548640" y="1691640"/>
+            <a:ext cx="6309360" cy="4732020"/>
+          </a:xfrm>
+          <a:prstGeom prst="rect">
+            <a:avLst/>
+          </a:prstGeom>
+        </p:spPr>
+      </p:pic>
+      <p:sp>
+        <p:nvSpPr>
+          <p:cNvPr id="5" name="Shape 2"/>
+          <p:cNvSpPr/>
+          <p:nvPr/>
+        </p:nvSpPr>
+        <p:spPr>
+          <a:xfrm>
+            <a:off x="7635240" y="1783080"/>
+            <a:ext cx="420624" cy="420624"/>
+          </a:xfrm>
+          <a:prstGeom prst="ellipse">
+            <a:avLst/>
+          </a:prstGeom>
+          <a:solidFill>
+            <a:srgbClr val="123F3A"/>
+          </a:solidFill>
+          <a:ln w="15875">
+            <a:solidFill>
+              <a:srgbClr val="3ED6C0"/>
+            </a:solidFill>
+            <a:prstDash val="solid"/>
+          </a:ln>
+        </p:spPr>
+      </p:sp>
+      <p:sp>
+        <p:nvSpPr>
+          <p:cNvPr id="6" name="Text 3"/>
+          <p:cNvSpPr txBox="1"/>
+          <p:nvPr/>
+        </p:nvSpPr>
+        <p:spPr>
+          <a:xfrm>
+            <a:off x="7635240" y="1783080"/>
+            <a:ext cx="420624" cy="420624"/>
+          </a:xfrm>
+          <a:prstGeom prst="rect">
+            <a:avLst/>
+          </a:prstGeom>
+          <a:noFill/>
+          <a:ln/>
+        </p:spPr>
+        <p:txBody>
+          <a:bodyPr wrap="square" lIns="0" tIns="0" rIns="0" bIns="0" rtlCol="0" anchor="ctr"/>
+          <a:lstStyle/>
+          <a:p>
+            <a:pPr algn="ctr" indent="0" marL="0">
+              <a:buNone/>
+            </a:pPr>
+            <a:r>
+              <a:rPr lang="en-US" sz="1400" b="1" dirty="0">
+                <a:solidFill>
+                  <a:srgbClr val="3ED6C0"/>
+                </a:solidFill>
+                <a:latin typeface="Arial" pitchFamily="34" charset="0"/>
+                <a:ea typeface="Arial" pitchFamily="34" charset="-122"/>
+                <a:cs typeface="Arial" pitchFamily="34" charset="-120"/>
+              </a:rPr>
+              <a:t>1</a:t>
+            </a:r>
+            <a:endParaRPr lang="en-US" sz="1400" dirty="0"/>
+          </a:p>
+        </p:txBody>
+      </p:sp>
+      <p:sp>
+        <p:nvSpPr>
+          <p:cNvPr id="7" name="Text 4"/>
+          <p:cNvSpPr txBox="1"/>
+          <p:nvPr/>
+        </p:nvSpPr>
+        <p:spPr>
+          <a:xfrm>
+            <a:off x="8229600" y="1737360"/>
+            <a:ext cx="3474720" cy="411480"/>
+          </a:xfrm>
+          <a:prstGeom prst="rect">
+            <a:avLst/>
+          </a:prstGeom>
+          <a:noFill/>
+          <a:ln/>
+        </p:spPr>
+        <p:txBody>
+          <a:bodyPr wrap="square" lIns="0" tIns="0" rIns="0" bIns="0" rtlCol="0" anchor="ctr"/>
+          <a:lstStyle/>
+          <a:p>
+            <a:pPr indent="0" marL="0">
+              <a:buNone/>
+            </a:pPr>
+            <a:r>
+              <a:rPr lang="en-US" sz="1600" b="1" dirty="0">
+                <a:solidFill>
+                  <a:srgbClr val="F4F6F8"/>
+                </a:solidFill>
+                <a:latin typeface="Arial" pitchFamily="34" charset="0"/>
+                <a:ea typeface="Arial" pitchFamily="34" charset="-122"/>
+                <a:cs typeface="Arial" pitchFamily="34" charset="-120"/>
+              </a:rPr>
+              <a:t>Real data, the real pipeline</a:t>
+            </a:r>
+            <a:endParaRPr lang="en-US" sz="1600" dirty="0"/>
+          </a:p>
+        </p:txBody>
+      </p:sp>
+      <p:sp>
+        <p:nvSpPr>
+          <p:cNvPr id="8" name="Text 5"/>
+          <p:cNvSpPr txBox="1"/>
+          <p:nvPr/>
+        </p:nvSpPr>
+        <p:spPr>
+          <a:xfrm>
+            <a:off x="8229600" y="2167128"/>
+            <a:ext cx="3474720" cy="1005840"/>
+          </a:xfrm>
+          <a:prstGeom prst="rect">
+            <a:avLst/>
+          </a:prstGeom>
+          <a:noFill/>
+          <a:ln/>
+        </p:spPr>
+        <p:txBody>
+          <a:bodyPr wrap="square" lIns="0" tIns="0" rIns="0" bIns="0" rtlCol="0" anchor="ctr"/>
+          <a:lstStyle/>
+          <a:p>
+            <a:pPr indent="0" marL="0">
+              <a:buNone/>
+            </a:pPr>
+            <a:r>
+              <a:rPr lang="en-US" sz="1350" dirty="0">
+                <a:solidFill>
+                  <a:srgbClr val="A9B2BE"/>
+                </a:solidFill>
+                <a:latin typeface="Arial" pitchFamily="34" charset="0"/>
+                <a:ea typeface="Arial" pitchFamily="34" charset="-122"/>
+                <a:cs typeface="Arial" pitchFamily="34" charset="-120"/>
+              </a:rPr>
+              <a:t>each click replays a month of KKBox (Jan–Feb 2017) through features, validation, drift, training and evaluation</a:t>
+            </a:r>
+            <a:endParaRPr lang="en-US" sz="1350" dirty="0"/>
+          </a:p>
+        </p:txBody>
+      </p:sp>
+      <p:sp>
+        <p:nvSpPr>
+          <p:cNvPr id="9" name="Shape 6"/>
+          <p:cNvSpPr/>
+          <p:nvPr/>
+        </p:nvSpPr>
+        <p:spPr>
+          <a:xfrm>
+            <a:off x="7635240" y="3264408"/>
+            <a:ext cx="420624" cy="420624"/>
+          </a:xfrm>
+          <a:prstGeom prst="ellipse">
+            <a:avLst/>
+          </a:prstGeom>
+          <a:solidFill>
+            <a:srgbClr val="123F3A"/>
+          </a:solidFill>
+          <a:ln w="15875">
+            <a:solidFill>
+              <a:srgbClr val="3ED6C0"/>
+            </a:solidFill>
+            <a:prstDash val="solid"/>
+          </a:ln>
+        </p:spPr>
+      </p:sp>
+      <p:sp>
+        <p:nvSpPr>
+          <p:cNvPr id="10" name="Text 7"/>
+          <p:cNvSpPr txBox="1"/>
+          <p:nvPr/>
+        </p:nvSpPr>
+        <p:spPr>
+          <a:xfrm>
+            <a:off x="7635240" y="3264408"/>
+            <a:ext cx="420624" cy="420624"/>
+          </a:xfrm>
+          <a:prstGeom prst="rect">
+            <a:avLst/>
+          </a:prstGeom>
+          <a:noFill/>
+          <a:ln/>
+        </p:spPr>
+        <p:txBody>
+          <a:bodyPr wrap="square" lIns="0" tIns="0" rIns="0" bIns="0" rtlCol="0" anchor="ctr"/>
+          <a:lstStyle/>
+          <a:p>
+            <a:pPr algn="ctr" indent="0" marL="0">
+              <a:buNone/>
+            </a:pPr>
+            <a:r>
+              <a:rPr lang="en-US" sz="1400" b="1" dirty="0">
+                <a:solidFill>
+                  <a:srgbClr val="3ED6C0"/>
+                </a:solidFill>
+                <a:latin typeface="Arial" pitchFamily="34" charset="0"/>
+                <a:ea typeface="Arial" pitchFamily="34" charset="-122"/>
+                <a:cs typeface="Arial" pitchFamily="34" charset="-120"/>
+              </a:rPr>
+              <a:t>2</a:t>
+            </a:r>
+            <a:endParaRPr lang="en-US" sz="1400" dirty="0"/>
+          </a:p>
+        </p:txBody>
+      </p:sp>
+      <p:sp>
+        <p:nvSpPr>
+          <p:cNvPr id="11" name="Text 8"/>
+          <p:cNvSpPr txBox="1"/>
+          <p:nvPr/>
+        </p:nvSpPr>
+        <p:spPr>
+          <a:xfrm>
+            <a:off x="8229600" y="3218688"/>
+            <a:ext cx="3474720" cy="411480"/>
+          </a:xfrm>
+          <a:prstGeom prst="rect">
+            <a:avLst/>
+          </a:prstGeom>
+          <a:noFill/>
+          <a:ln/>
+        </p:spPr>
+        <p:txBody>
+          <a:bodyPr wrap="square" lIns="0" tIns="0" rIns="0" bIns="0" rtlCol="0" anchor="ctr"/>
+          <a:lstStyle/>
+          <a:p>
+            <a:pPr indent="0" marL="0">
+              <a:buNone/>
+            </a:pPr>
+            <a:r>
+              <a:rPr lang="en-US" sz="1600" b="1" dirty="0">
+                <a:solidFill>
+                  <a:srgbClr val="F4F6F8"/>
+                </a:solidFill>
+                <a:latin typeface="Arial" pitchFamily="34" charset="0"/>
+                <a:ea typeface="Arial" pitchFamily="34" charset="-122"/>
+                <a:cs typeface="Arial" pitchFamily="34" charset="-120"/>
+              </a:rPr>
+              <a:t>The gate decides, live</a:t>
+            </a:r>
+            <a:endParaRPr lang="en-US" sz="1600" dirty="0"/>
+          </a:p>
+        </p:txBody>
+      </p:sp>
+      <p:sp>
+        <p:nvSpPr>
+          <p:cNvPr id="12" name="Text 9"/>
+          <p:cNvSpPr txBox="1"/>
+          <p:nvPr/>
+        </p:nvSpPr>
+        <p:spPr>
+          <a:xfrm>
+            <a:off x="8229600" y="3648456"/>
+            <a:ext cx="3474720" cy="1005840"/>
+          </a:xfrm>
+          <a:prstGeom prst="rect">
+            <a:avLst/>
+          </a:prstGeom>
+          <a:noFill/>
+          <a:ln/>
+        </p:spPr>
+        <p:txBody>
+          <a:bodyPr wrap="square" lIns="0" tIns="0" rIns="0" bIns="0" rtlCol="0" anchor="ctr"/>
+          <a:lstStyle/>
+          <a:p>
+            <a:pPr indent="0" marL="0">
+              <a:buNone/>
+            </a:pPr>
+            <a:r>
+              <a:rPr lang="en-US" sz="1350" dirty="0">
+                <a:solidFill>
+                  <a:srgbClr val="A9B2BE"/>
+                </a:solidFill>
+                <a:latin typeface="Arial" pitchFamily="34" charset="0"/>
+                <a:ea typeface="Arial" pitchFamily="34" charset="-122"/>
+                <a:cs typeface="Arial" pitchFamily="34" charset="-120"/>
+              </a:rPr>
+              <a:t>month 1 promoted; month 2 rejected (+0.0001, needs +0.005); month 3 promoted (0.0568 vs 0.0489)</a:t>
+            </a:r>
+            <a:endParaRPr lang="en-US" sz="1350" dirty="0"/>
+          </a:p>
+        </p:txBody>
+      </p:sp>
+      <p:sp>
+        <p:nvSpPr>
+          <p:cNvPr id="13" name="Shape 10"/>
+          <p:cNvSpPr/>
+          <p:nvPr/>
+        </p:nvSpPr>
+        <p:spPr>
+          <a:xfrm>
+            <a:off x="7635240" y="4745736"/>
+            <a:ext cx="420624" cy="420624"/>
+          </a:xfrm>
+          <a:prstGeom prst="ellipse">
+            <a:avLst/>
+          </a:prstGeom>
+          <a:solidFill>
+            <a:srgbClr val="123F3A"/>
+          </a:solidFill>
+          <a:ln w="15875">
+            <a:solidFill>
+              <a:srgbClr val="3ED6C0"/>
+            </a:solidFill>
+            <a:prstDash val="solid"/>
+          </a:ln>
+        </p:spPr>
+      </p:sp>
+      <p:sp>
+        <p:nvSpPr>
+          <p:cNvPr id="14" name="Text 11"/>
+          <p:cNvSpPr txBox="1"/>
+          <p:nvPr/>
+        </p:nvSpPr>
+        <p:spPr>
+          <a:xfrm>
+            <a:off x="7635240" y="4745736"/>
+            <a:ext cx="420624" cy="420624"/>
+          </a:xfrm>
+          <a:prstGeom prst="rect">
+            <a:avLst/>
+          </a:prstGeom>
+          <a:noFill/>
+          <a:ln/>
+        </p:spPr>
+        <p:txBody>
+          <a:bodyPr wrap="square" lIns="0" tIns="0" rIns="0" bIns="0" rtlCol="0" anchor="ctr"/>
+          <a:lstStyle/>
+          <a:p>
+            <a:pPr algn="ctr" indent="0" marL="0">
+              <a:buNone/>
+            </a:pPr>
+            <a:r>
+              <a:rPr lang="en-US" sz="1400" b="1" dirty="0">
+                <a:solidFill>
+                  <a:srgbClr val="3ED6C0"/>
+                </a:solidFill>
+                <a:latin typeface="Arial" pitchFamily="34" charset="0"/>
+                <a:ea typeface="Arial" pitchFamily="34" charset="-122"/>
+                <a:cs typeface="Arial" pitchFamily="34" charset="-120"/>
+              </a:rPr>
+              <a:t>3</a:t>
+            </a:r>
+            <a:endParaRPr lang="en-US" sz="1400" dirty="0"/>
+          </a:p>
+        </p:txBody>
+      </p:sp>
+      <p:sp>
+        <p:nvSpPr>
+          <p:cNvPr id="15" name="Text 12"/>
+          <p:cNvSpPr txBox="1"/>
+          <p:nvPr/>
+        </p:nvSpPr>
+        <p:spPr>
+          <a:xfrm>
+            <a:off x="8229600" y="4700016"/>
+            <a:ext cx="3474720" cy="411480"/>
+          </a:xfrm>
+          <a:prstGeom prst="rect">
+            <a:avLst/>
+          </a:prstGeom>
+          <a:noFill/>
+          <a:ln/>
+        </p:spPr>
+        <p:txBody>
+          <a:bodyPr wrap="square" lIns="0" tIns="0" rIns="0" bIns="0" rtlCol="0" anchor="ctr"/>
+          <a:lstStyle/>
+          <a:p>
+            <a:pPr indent="0" marL="0">
+              <a:buNone/>
+            </a:pPr>
+            <a:r>
+              <a:rPr lang="en-US" sz="1600" b="1" dirty="0">
+                <a:solidFill>
+                  <a:srgbClr val="F4F6F8"/>
+                </a:solidFill>
+                <a:latin typeface="Arial" pitchFamily="34" charset="0"/>
+                <a:ea typeface="Arial" pitchFamily="34" charset="-122"/>
+                <a:cs typeface="Arial" pitchFamily="34" charset="-120"/>
+              </a:rPr>
+              <a:t>A win really deploys</a:t>
+            </a:r>
+            <a:endParaRPr lang="en-US" sz="1600" dirty="0"/>
+          </a:p>
+        </p:txBody>
+      </p:sp>
+      <p:sp>
+        <p:nvSpPr>
+          <p:cNvPr id="16" name="Text 13"/>
+          <p:cNvSpPr txBox="1"/>
+          <p:nvPr/>
+        </p:nvSpPr>
+        <p:spPr>
+          <a:xfrm>
+            <a:off x="8229600" y="5129784"/>
+            <a:ext cx="3474720" cy="1005840"/>
+          </a:xfrm>
+          <a:prstGeom prst="rect">
+            <a:avLst/>
+          </a:prstGeom>
+          <a:noFill/>
+          <a:ln/>
+        </p:spPr>
+        <p:txBody>
+          <a:bodyPr wrap="square" lIns="0" tIns="0" rIns="0" bIns="0" rtlCol="0" anchor="ctr"/>
+          <a:lstStyle/>
+          <a:p>
+            <a:pPr indent="0" marL="0">
+              <a:buNone/>
+            </a:pPr>
+            <a:r>
+              <a:rPr lang="en-US" sz="1350" dirty="0">
+                <a:solidFill>
+                  <a:srgbClr val="A9B2BE"/>
+                </a:solidFill>
+                <a:latin typeface="Arial" pitchFamily="34" charset="0"/>
+                <a:ea typeface="Arial" pitchFamily="34" charset="-122"/>
+                <a:cs typeface="Arial" pitchFamily="34" charset="-120"/>
+              </a:rPr>
+              <a:t>the API hot-loads the new model and MLflow moves @champion. Restore puts the tested model back</a:t>
+            </a:r>
+            <a:endParaRPr lang="en-US" sz="1350" dirty="0"/>
+          </a:p>
+        </p:txBody>
+      </p:sp>
+    </p:spTree>
+  </p:cSld>
+  <p:clrMapOvr>
+    <a:masterClrMapping/>
+  </p:clrMapOvr>
+</p:sld>
+</file>
+
 <file path=ppt/slides/slide2.xml><?xml version="1.0" encoding="utf-8"?>
 <p:sld xmlns:a="http://schemas.openxmlformats.org/drawingml/2006/main" xmlns:r="http://schemas.openxmlformats.org/officeDocument/2006/relationships" xmlns:p="http://schemas.openxmlformats.org/presentationml/2006/main">
   <p:cSld name="Slide 2">

--- a/docs/viva/slides.pptx
+++ b/docs/viva/slides.pptx
@@ -2692,7 +2692,7 @@
                 <a:ea typeface="Arial" pitchFamily="34" charset="-122"/>
                 <a:cs typeface="Arial" pitchFamily="34" charset="-120"/>
               </a:rPr>
-              <a:t>AUTOMATION · 7 GITHUB ACTIONS JOBS ON EVERY PUSH</a:t>
+              <a:t>AUTOMATION · 8 GITHUB ACTIONS JOBS ON EVERY PUSH</a:t>
             </a:r>
             <a:endParaRPr lang="en-US" sz="1100" dirty="0"/>
           </a:p>
@@ -2868,7 +2868,7 @@
                 <a:ea typeface="Arial" pitchFamily="34" charset="-122"/>
                 <a:cs typeface="Arial" pitchFamily="34" charset="-120"/>
               </a:rPr>
-              <a:t>Lint + 456 tests</a:t>
+              <a:t>Lint + 457 tests</a:t>
             </a:r>
             <a:endParaRPr lang="en-US" sz="1600" dirty="0"/>
           </a:p>
@@ -3748,7 +3748,7 @@
                 <a:ea typeface="Arial" pitchFamily="34" charset="-122"/>
                 <a:cs typeface="Arial" pitchFamily="34" charset="-120"/>
               </a:rPr>
-              <a:t>Docker image</a:t>
+              <a:t>Docker + Kubernetes</a:t>
             </a:r>
             <a:endParaRPr lang="en-US" sz="1600" dirty="0"/>
           </a:p>
@@ -3787,7 +3787,7 @@
                 <a:ea typeface="Arial" pitchFamily="34" charset="-122"/>
                 <a:cs typeface="Arial" pitchFamily="34" charset="-120"/>
               </a:rPr>
-              <a:t>built and smoke-tested</a:t>
+              <a:t>smoke-tested, then deployed to a kind cluster</a:t>
             </a:r>
             <a:endParaRPr lang="en-US" sz="1250" dirty="0"/>
           </a:p>

--- a/docs/viva/slides.pptx
+++ b/docs/viva/slides.pptx
@@ -5580,7 +5580,7 @@
                 <a:ea typeface="Arial" pitchFamily="34" charset="-122"/>
                 <a:cs typeface="Arial" pitchFamily="34" charset="-120"/>
               </a:rPr>
-              <a:t>each click replays a month of KKBox (Jan–Feb 2017) through features, validation, drift, training and evaluation</a:t>
+              <a:t>one click replays three months of KKBox (Jan–Feb 2017) through features, validation, drift, training and evaluation</a:t>
             </a:r>
             <a:endParaRPr lang="en-US" sz="1350" dirty="0"/>
           </a:p>
